--- a/deliver/电商运营报表自动化Agent/03.ppt/电商运营报表自动化Agent.pptx
+++ b/deliver/电商运营报表自动化Agent/03.ppt/电商运营报表自动化Agent.pptx
@@ -16,6 +16,7 @@
     <p:sldId id="261" r:id="rId6"/>
     <p:sldId id="262" r:id="rId7"/>
     <p:sldId id="263" r:id="rId8"/>
+    <p:sldId id="268" r:id="rId18"/>
     <p:sldId id="264" r:id="rId9"/>
     <p:sldId id="265" r:id="rId10"/>
     <p:sldId id="266" r:id="rId11"/>
@@ -2545,7 +2546,7 @@
                 <a:latin typeface="思源黑体"/>
                 <a:ea typeface="思源黑体"/>
               </a:rPr>
-              <a:t>10 / 12</a:t>
+              <a:t>11 / 13</a:t>
             </a:r>
             <a:endParaRPr/>
           </a:p>
@@ -3791,7 +3792,7 @@
                 <a:latin typeface="思源黑体"/>
                 <a:ea typeface="思源黑体"/>
               </a:rPr>
-              <a:t>11 / 12</a:t>
+              <a:t>12 / 13</a:t>
             </a:r>
             <a:endParaRPr/>
           </a:p>
@@ -4464,6 +4465,1025 @@
 </p:sld>
 </file>
 
+<file path=ppt/slides/slide13.xml><?xml version="1.0" encoding="utf-8"?>
+<p:sld xmlns:a="http://schemas.openxmlformats.org/drawingml/2006/main" xmlns:p="http://schemas.openxmlformats.org/presentationml/2006/main" xmlns:r="http://schemas.openxmlformats.org/officeDocument/2006/relationships">
+  <p:cSld>
+    <p:spTree>
+      <p:nvGrpSpPr>
+        <p:cNvPr id="1" name=""/>
+        <p:cNvGrpSpPr/>
+        <p:nvPr/>
+      </p:nvGrpSpPr>
+      <p:grpSpPr/>
+      <p:sp>
+        <p:nvSpPr>
+          <p:cNvPr id="268" name=""/>
+          <p:cNvSpPr/>
+          <p:nvPr/>
+        </p:nvSpPr>
+        <p:spPr>
+          <a:xfrm rot="0" flipH="0" flipV="0">
+            <a:off x="0" y="0"/>
+            <a:ext cx="12192000" cy="6858000"/>
+          </a:xfrm>
+          <a:prstGeom prst="rect">
+            <a:avLst/>
+          </a:prstGeom>
+          <a:solidFill>
+            <a:srgbClr val="FFFFFF"/>
+          </a:solidFill>
+          <a:ln/>
+        </p:spPr>
+        <p:txBody>
+          <a:bodyPr/>
+          <a:p/>
+        </p:txBody>
+      </p:sp>
+      <p:sp>
+        <p:nvSpPr>
+          <p:cNvPr id="269" name="" descr="{&quot;isTemplate&quot;:true,&quot;type&quot;:&quot;text&quot;}"/>
+          <p:cNvSpPr txBox="1"/>
+          <p:nvPr/>
+        </p:nvSpPr>
+        <p:spPr>
+          <a:xfrm rot="0" flipH="0" flipV="0">
+            <a:off x="609600" y="352425"/>
+            <a:ext cx="3562350" cy="390525"/>
+          </a:xfrm>
+          <a:prstGeom prst="rect"/>
+        </p:spPr>
+        <p:txBody>
+          <a:bodyPr wrap="none" lIns="0" tIns="0" rIns="0" bIns="0"/>
+          <a:p>
+            <a:pPr>
+              <a:lnSpc>
+                <a:spcPct val="100000"/>
+              </a:lnSpc>
+            </a:pPr>
+            <a:r>
+              <a:rPr lang="zh-CN" sz="2550" b="1">
+                <a:solidFill>
+                  <a:srgbClr val="0F172A"/>
+                </a:solidFill>
+                <a:latin typeface="思源黑体"/>
+                <a:ea typeface="思源黑体"/>
+              </a:rPr>
+              <a:t>任务书要求的功能补齐</a:t>
+            </a:r>
+            <a:endParaRPr/>
+          </a:p>
+        </p:txBody>
+      </p:sp>
+      <p:sp>
+        <p:nvSpPr>
+          <p:cNvPr id="270" name="" descr="{&quot;isTemplate&quot;:true,&quot;type&quot;:&quot;text&quot;}"/>
+          <p:cNvSpPr txBox="1"/>
+          <p:nvPr/>
+        </p:nvSpPr>
+        <p:spPr>
+          <a:xfrm rot="0" flipH="0" flipV="0">
+            <a:off x="609600" y="800100"/>
+            <a:ext cx="3562350" cy="190500"/>
+          </a:xfrm>
+          <a:prstGeom prst="rect"/>
+        </p:spPr>
+        <p:txBody>
+          <a:bodyPr wrap="none" lIns="0" tIns="0" rIns="0" bIns="0"/>
+          <a:p>
+            <a:pPr>
+              <a:lnSpc>
+                <a:spcPct val="100000"/>
+              </a:lnSpc>
+            </a:pPr>
+            <a:r>
+              <a:rPr lang="zh-CN" sz="1200">
+                <a:solidFill>
+                  <a:srgbClr val="64748B"/>
+                </a:solidFill>
+                <a:latin typeface="思源黑体"/>
+                <a:ea typeface="思源黑体"/>
+              </a:rPr>
+              <a:t>定时 · 批量 · 意见沉淀 · 权限——逐条落地可验证</a:t>
+            </a:r>
+            <a:endParaRPr/>
+          </a:p>
+        </p:txBody>
+      </p:sp>
+      <p:sp>
+        <p:nvSpPr>
+          <p:cNvPr id="271" name=""/>
+          <p:cNvSpPr/>
+          <p:nvPr/>
+        </p:nvSpPr>
+        <p:spPr>
+          <a:xfrm rot="0" flipH="0" flipV="0">
+            <a:off x="609600" y="1143000"/>
+            <a:ext cx="3543300" cy="4333875"/>
+          </a:xfrm>
+          <a:prstGeom prst="roundRect">
+            <a:avLst>
+              <a:gd name="adj" fmla="val 3226"/>
+            </a:avLst>
+          </a:prstGeom>
+          <a:solidFill>
+            <a:srgbClr val="FFFFFF"/>
+          </a:solidFill>
+          <a:ln w="12700">
+            <a:solidFill>
+              <a:srgbClr val="E2E8F0"/>
+            </a:solidFill>
+            <a:prstDash val="solid"/>
+          </a:ln>
+          <a:effectLst>
+            <a:outerShdw blurRad="190500" dist="38100" dir="5400000">
+              <a:srgbClr val="0F172A">
+                <a:alpha val="8000"/>
+              </a:srgbClr>
+            </a:outerShdw>
+          </a:effectLst>
+        </p:spPr>
+        <p:txBody>
+          <a:bodyPr/>
+          <a:p/>
+        </p:txBody>
+      </p:sp>
+      <p:sp>
+        <p:nvSpPr>
+          <p:cNvPr id="272" name=""/>
+          <p:cNvSpPr/>
+          <p:nvPr/>
+        </p:nvSpPr>
+        <p:spPr>
+          <a:xfrm rot="0" flipH="0" flipV="0">
+            <a:off x="609600" y="1143000"/>
+            <a:ext cx="3543300" cy="523875"/>
+          </a:xfrm>
+          <a:custGeom>
+            <a:pathLst>
+              <a:path w="372" h="55">
+                <a:moveTo>
+                  <a:pt x="360" y="0"/>
+                </a:moveTo>
+                <a:cubicBezTo>
+                  <a:pt x="367" y="0"/>
+                  <a:pt x="372" y="5"/>
+                  <a:pt x="372" y="12"/>
+                </a:cubicBezTo>
+                <a:lnTo>
+                  <a:pt x="372" y="55"/>
+                </a:lnTo>
+                <a:lnTo>
+                  <a:pt x="0" y="55"/>
+                </a:lnTo>
+                <a:lnTo>
+                  <a:pt x="0" y="12"/>
+                </a:lnTo>
+                <a:cubicBezTo>
+                  <a:pt x="0" y="5"/>
+                  <a:pt x="5" y="0"/>
+                  <a:pt x="12" y="0"/>
+                </a:cubicBezTo>
+                <a:lnTo>
+                  <a:pt x="360" y="0"/>
+                </a:lnTo>
+                <a:close/>
+              </a:path>
+            </a:pathLst>
+          </a:custGeom>
+          <a:gradFill>
+            <a:gsLst>
+              <a:gs pos="0">
+                <a:srgbClr val="2563EB"/>
+              </a:gs>
+              <a:gs pos="100000">
+                <a:srgbClr val="0EA5E9"/>
+              </a:gs>
+            </a:gsLst>
+            <a:lin ang="2700000" scaled="1"/>
+          </a:gradFill>
+          <a:ln/>
+        </p:spPr>
+        <p:txBody>
+          <a:bodyPr/>
+          <a:p/>
+        </p:txBody>
+      </p:sp>
+      <p:sp>
+        <p:nvSpPr>
+          <p:cNvPr id="273" name="" descr="{&quot;isTemplate&quot;:true,&quot;type&quot;:&quot;text&quot;}"/>
+          <p:cNvSpPr txBox="1"/>
+          <p:nvPr/>
+        </p:nvSpPr>
+        <p:spPr>
+          <a:xfrm rot="0" flipH="0" flipV="0">
+            <a:off x="819150" y="1276350"/>
+            <a:ext cx="3124200" cy="257175"/>
+          </a:xfrm>
+          <a:prstGeom prst="rect"/>
+        </p:spPr>
+        <p:txBody>
+          <a:bodyPr wrap="none" lIns="0" tIns="0" rIns="0" bIns="0"/>
+          <a:p>
+            <a:pPr>
+              <a:lnSpc>
+                <a:spcPct val="100000"/>
+              </a:lnSpc>
+            </a:pPr>
+            <a:r>
+              <a:rPr lang="en-US" sz="1650" b="1">
+                <a:solidFill>
+                  <a:srgbClr val="FFFFFF"/>
+                </a:solidFill>
+                <a:latin typeface="思源黑体"/>
+                <a:ea typeface="思源黑体"/>
+              </a:rPr>
+              <a:t>① 定时与批量任务</a:t>
+            </a:r>
+            <a:endParaRPr/>
+          </a:p>
+        </p:txBody>
+      </p:sp>
+      <p:sp>
+        <p:nvSpPr>
+          <p:cNvPr id="274" name="" descr="{&quot;isTemplate&quot;:true,&quot;type&quot;:&quot;text&quot;}"/>
+          <p:cNvSpPr txBox="1"/>
+          <p:nvPr/>
+        </p:nvSpPr>
+        <p:spPr>
+          <a:xfrm rot="0" flipH="0" flipV="0">
+            <a:off x="781050" y="1838325"/>
+            <a:ext cx="3200400" cy="990600"/>
+          </a:xfrm>
+          <a:prstGeom prst="rect"/>
+        </p:spPr>
+        <p:txBody>
+          <a:bodyPr wrap="square" lIns="0" tIns="0" rIns="0" bIns="0">
+            <a:normAutofit/>
+          </a:bodyPr>
+          <a:p>
+            <a:pPr>
+              <a:lnSpc>
+                <a:spcPct val="160000"/>
+              </a:lnSpc>
+            </a:pPr>
+            <a:r>
+              <a:rPr lang="zh-CN" sz="1350">
+                <a:solidFill>
+                  <a:srgbClr val="0F172A"/>
+                </a:solidFill>
+                <a:latin typeface="思源黑体"/>
+                <a:ea typeface="思源黑体"/>
+              </a:rPr>
+              <a:t>定时任务按 cron 计划自动生成报表，支持启停与「立即执行」验证；任务定义入库持久化。</a:t>
+            </a:r>
+            <a:endParaRPr/>
+          </a:p>
+        </p:txBody>
+      </p:sp>
+      <p:sp>
+        <p:nvSpPr>
+          <p:cNvPr id="275" name="" descr="{&quot;isTemplate&quot;:true,&quot;type&quot;:&quot;text&quot;}"/>
+          <p:cNvSpPr txBox="1"/>
+          <p:nvPr/>
+        </p:nvSpPr>
+        <p:spPr>
+          <a:xfrm rot="0" flipH="0" flipV="0">
+            <a:off x="781050" y="2943225"/>
+            <a:ext cx="3200400" cy="666750"/>
+          </a:xfrm>
+          <a:prstGeom prst="rect"/>
+        </p:spPr>
+        <p:txBody>
+          <a:bodyPr wrap="square" lIns="0" tIns="0" rIns="0" bIns="0">
+            <a:normAutofit/>
+          </a:bodyPr>
+          <a:p>
+            <a:pPr>
+              <a:lnSpc>
+                <a:spcPct val="160000"/>
+              </a:lnSpc>
+            </a:pPr>
+            <a:r>
+              <a:rPr lang="zh-CN" sz="1350">
+                <a:solidFill>
+                  <a:srgbClr val="0F172A"/>
+                </a:solidFill>
+                <a:latin typeface="思源黑体"/>
+                <a:ea typeface="思源黑体"/>
+              </a:rPr>
+              <a:t>批量任务一次提交多条指令（≤20 条），报告共享同一批次号，便于成组查看。</a:t>
+            </a:r>
+            <a:endParaRPr/>
+          </a:p>
+        </p:txBody>
+      </p:sp>
+      <p:sp>
+        <p:nvSpPr>
+          <p:cNvPr id="276" name="" descr="{&quot;isTemplate&quot;:true,&quot;type&quot;:&quot;text&quot;}"/>
+          <p:cNvSpPr txBox="1"/>
+          <p:nvPr/>
+        </p:nvSpPr>
+        <p:spPr>
+          <a:xfrm rot="0" flipH="0" flipV="0">
+            <a:off x="781050" y="5105400"/>
+            <a:ext cx="3200400" cy="200025"/>
+          </a:xfrm>
+          <a:prstGeom prst="rect"/>
+        </p:spPr>
+        <p:txBody>
+          <a:bodyPr wrap="none" lIns="0" tIns="0" rIns="0" bIns="0"/>
+          <a:p>
+            <a:pPr>
+              <a:lnSpc>
+                <a:spcPct val="100000"/>
+              </a:lnSpc>
+            </a:pPr>
+            <a:r>
+              <a:rPr lang="zh-CN" sz="1275" b="1">
+                <a:solidFill>
+                  <a:srgbClr val="F59E0B"/>
+                </a:solidFill>
+                <a:latin typeface="思源黑体"/>
+                <a:ea typeface="思源黑体"/>
+              </a:rPr>
+              <a:t>非法 cron 直接 400 拒绝 ｜ 单次最多 20 条</a:t>
+            </a:r>
+            <a:endParaRPr/>
+          </a:p>
+        </p:txBody>
+      </p:sp>
+      <p:sp>
+        <p:nvSpPr>
+          <p:cNvPr id="277" name=""/>
+          <p:cNvSpPr/>
+          <p:nvPr/>
+        </p:nvSpPr>
+        <p:spPr>
+          <a:xfrm rot="0" flipH="0" flipV="0">
+            <a:off x="4324350" y="1143000"/>
+            <a:ext cx="3543300" cy="4333875"/>
+          </a:xfrm>
+          <a:prstGeom prst="roundRect">
+            <a:avLst>
+              <a:gd name="adj" fmla="val 3226"/>
+            </a:avLst>
+          </a:prstGeom>
+          <a:solidFill>
+            <a:srgbClr val="FFFFFF"/>
+          </a:solidFill>
+          <a:ln w="12700">
+            <a:solidFill>
+              <a:srgbClr val="E2E8F0"/>
+            </a:solidFill>
+            <a:prstDash val="solid"/>
+          </a:ln>
+          <a:effectLst>
+            <a:outerShdw blurRad="190500" dist="38100" dir="5400000">
+              <a:srgbClr val="0F172A">
+                <a:alpha val="8000"/>
+              </a:srgbClr>
+            </a:outerShdw>
+          </a:effectLst>
+        </p:spPr>
+        <p:txBody>
+          <a:bodyPr/>
+          <a:p/>
+        </p:txBody>
+      </p:sp>
+      <p:sp>
+        <p:nvSpPr>
+          <p:cNvPr id="278" name=""/>
+          <p:cNvSpPr/>
+          <p:nvPr/>
+        </p:nvSpPr>
+        <p:spPr>
+          <a:xfrm rot="0" flipH="0" flipV="0">
+            <a:off x="4324350" y="1143000"/>
+            <a:ext cx="3543300" cy="523875"/>
+          </a:xfrm>
+          <a:custGeom>
+            <a:pathLst>
+              <a:path w="372" h="55">
+                <a:moveTo>
+                  <a:pt x="360" y="0"/>
+                </a:moveTo>
+                <a:cubicBezTo>
+                  <a:pt x="367" y="0"/>
+                  <a:pt x="372" y="5"/>
+                  <a:pt x="372" y="12"/>
+                </a:cubicBezTo>
+                <a:lnTo>
+                  <a:pt x="372" y="55"/>
+                </a:lnTo>
+                <a:lnTo>
+                  <a:pt x="0" y="55"/>
+                </a:lnTo>
+                <a:lnTo>
+                  <a:pt x="0" y="12"/>
+                </a:lnTo>
+                <a:cubicBezTo>
+                  <a:pt x="0" y="5"/>
+                  <a:pt x="5" y="0"/>
+                  <a:pt x="12" y="0"/>
+                </a:cubicBezTo>
+                <a:lnTo>
+                  <a:pt x="360" y="0"/>
+                </a:lnTo>
+                <a:close/>
+              </a:path>
+            </a:pathLst>
+          </a:custGeom>
+          <a:gradFill>
+            <a:gsLst>
+              <a:gs pos="0">
+                <a:srgbClr val="2563EB"/>
+              </a:gs>
+              <a:gs pos="100000">
+                <a:srgbClr val="0EA5E9"/>
+              </a:gs>
+            </a:gsLst>
+            <a:lin ang="2700000" scaled="1"/>
+          </a:gradFill>
+          <a:ln/>
+        </p:spPr>
+        <p:txBody>
+          <a:bodyPr/>
+          <a:p/>
+        </p:txBody>
+      </p:sp>
+      <p:sp>
+        <p:nvSpPr>
+          <p:cNvPr id="279" name="" descr="{&quot;isTemplate&quot;:true,&quot;type&quot;:&quot;text&quot;}"/>
+          <p:cNvSpPr txBox="1"/>
+          <p:nvPr/>
+        </p:nvSpPr>
+        <p:spPr>
+          <a:xfrm rot="0" flipH="0" flipV="0">
+            <a:off x="4533900" y="1276350"/>
+            <a:ext cx="3124200" cy="257175"/>
+          </a:xfrm>
+          <a:prstGeom prst="rect"/>
+        </p:spPr>
+        <p:txBody>
+          <a:bodyPr wrap="none" lIns="0" tIns="0" rIns="0" bIns="0"/>
+          <a:p>
+            <a:pPr>
+              <a:lnSpc>
+                <a:spcPct val="100000"/>
+              </a:lnSpc>
+            </a:pPr>
+            <a:r>
+              <a:rPr lang="en-US" sz="1650" b="1">
+                <a:solidFill>
+                  <a:srgbClr val="FFFFFF"/>
+                </a:solidFill>
+                <a:latin typeface="思源黑体"/>
+                <a:ea typeface="思源黑体"/>
+              </a:rPr>
+              <a:t>② 修改意见沉淀</a:t>
+            </a:r>
+            <a:endParaRPr/>
+          </a:p>
+        </p:txBody>
+      </p:sp>
+      <p:sp>
+        <p:nvSpPr>
+          <p:cNvPr id="280" name="" descr="{&quot;isTemplate&quot;:true,&quot;type&quot;:&quot;text&quot;}"/>
+          <p:cNvSpPr txBox="1"/>
+          <p:nvPr/>
+        </p:nvSpPr>
+        <p:spPr>
+          <a:xfrm rot="0" flipH="0" flipV="0">
+            <a:off x="4495800" y="1838325"/>
+            <a:ext cx="3200400" cy="990600"/>
+          </a:xfrm>
+          <a:prstGeom prst="rect"/>
+        </p:spPr>
+        <p:txBody>
+          <a:bodyPr wrap="square" lIns="0" tIns="0" rIns="0" bIns="0">
+            <a:normAutofit/>
+          </a:bodyPr>
+          <a:p>
+            <a:pPr>
+              <a:lnSpc>
+                <a:spcPct val="160000"/>
+              </a:lnSpc>
+            </a:pPr>
+            <a:r>
+              <a:rPr lang="zh-CN" sz="1350">
+                <a:solidFill>
+                  <a:srgbClr val="0F172A"/>
+                </a:solidFill>
+                <a:latin typeface="思源黑体"/>
+                <a:ea typeface="思源黑体"/>
+              </a:rPr>
+              <a:t>报告页可提交修改意见，按「指标数值 / 结论表述 / 格式排版 / 其他」四类归档。</a:t>
+            </a:r>
+            <a:endParaRPr/>
+          </a:p>
+        </p:txBody>
+      </p:sp>
+      <p:sp>
+        <p:nvSpPr>
+          <p:cNvPr id="281" name="" descr="{&quot;isTemplate&quot;:true,&quot;type&quot;:&quot;text&quot;}"/>
+          <p:cNvSpPr txBox="1"/>
+          <p:nvPr/>
+        </p:nvSpPr>
+        <p:spPr>
+          <a:xfrm rot="0" flipH="0" flipV="0">
+            <a:off x="4495800" y="2943225"/>
+            <a:ext cx="3200400" cy="666750"/>
+          </a:xfrm>
+          <a:prstGeom prst="rect"/>
+        </p:spPr>
+        <p:txBody>
+          <a:bodyPr wrap="square" lIns="0" tIns="0" rIns="0" bIns="0">
+            <a:normAutofit/>
+          </a:bodyPr>
+          <a:p>
+            <a:pPr>
+              <a:lnSpc>
+                <a:spcPct val="160000"/>
+              </a:lnSpc>
+            </a:pPr>
+            <a:r>
+              <a:rPr lang="zh-CN" sz="1350">
+                <a:solidFill>
+                  <a:srgbClr val="0F172A"/>
+                </a:solidFill>
+                <a:latin typeface="思源黑体"/>
+                <a:ea typeface="思源黑体"/>
+              </a:rPr>
+              <a:t>分类汇总后用于迭代报告模板与提示词，把一次性人工修正变成可复用改进输入。</a:t>
+            </a:r>
+            <a:endParaRPr/>
+          </a:p>
+        </p:txBody>
+      </p:sp>
+      <p:sp>
+        <p:nvSpPr>
+          <p:cNvPr id="282" name="" descr="{&quot;isTemplate&quot;:true,&quot;type&quot;:&quot;text&quot;}"/>
+          <p:cNvSpPr txBox="1"/>
+          <p:nvPr/>
+        </p:nvSpPr>
+        <p:spPr>
+          <a:xfrm rot="0" flipH="0" flipV="0">
+            <a:off x="4495800" y="5105400"/>
+            <a:ext cx="3200400" cy="200025"/>
+          </a:xfrm>
+          <a:prstGeom prst="rect"/>
+        </p:spPr>
+        <p:txBody>
+          <a:bodyPr wrap="none" lIns="0" tIns="0" rIns="0" bIns="0"/>
+          <a:p>
+            <a:pPr>
+              <a:lnSpc>
+                <a:spcPct val="100000"/>
+              </a:lnSpc>
+            </a:pPr>
+            <a:r>
+              <a:rPr lang="zh-CN" sz="1275" b="1">
+                <a:solidFill>
+                  <a:srgbClr val="F59E0B"/>
+                </a:solidFill>
+                <a:latin typeface="思源黑体"/>
+                <a:ea typeface="思源黑体"/>
+              </a:rPr>
+              <a:t>四类意见归档 ｜ 分类汇总接口</a:t>
+            </a:r>
+            <a:endParaRPr/>
+          </a:p>
+        </p:txBody>
+      </p:sp>
+      <p:sp>
+        <p:nvSpPr>
+          <p:cNvPr id="283" name=""/>
+          <p:cNvSpPr/>
+          <p:nvPr/>
+        </p:nvSpPr>
+        <p:spPr>
+          <a:xfrm rot="0" flipH="0" flipV="0">
+            <a:off x="8039100" y="1143000"/>
+            <a:ext cx="3543300" cy="4333875"/>
+          </a:xfrm>
+          <a:prstGeom prst="roundRect">
+            <a:avLst>
+              <a:gd name="adj" fmla="val 3226"/>
+            </a:avLst>
+          </a:prstGeom>
+          <a:solidFill>
+            <a:srgbClr val="FFFFFF"/>
+          </a:solidFill>
+          <a:ln w="12700">
+            <a:solidFill>
+              <a:srgbClr val="E2E8F0"/>
+            </a:solidFill>
+            <a:prstDash val="solid"/>
+          </a:ln>
+          <a:effectLst>
+            <a:outerShdw blurRad="190500" dist="38100" dir="5400000">
+              <a:srgbClr val="0F172A">
+                <a:alpha val="8000"/>
+              </a:srgbClr>
+            </a:outerShdw>
+          </a:effectLst>
+        </p:spPr>
+        <p:txBody>
+          <a:bodyPr/>
+          <a:p/>
+        </p:txBody>
+      </p:sp>
+      <p:sp>
+        <p:nvSpPr>
+          <p:cNvPr id="284" name=""/>
+          <p:cNvSpPr/>
+          <p:nvPr/>
+        </p:nvSpPr>
+        <p:spPr>
+          <a:xfrm rot="0" flipH="0" flipV="0">
+            <a:off x="8039100" y="1143000"/>
+            <a:ext cx="3543300" cy="523875"/>
+          </a:xfrm>
+          <a:custGeom>
+            <a:pathLst>
+              <a:path w="372" h="55">
+                <a:moveTo>
+                  <a:pt x="360" y="0"/>
+                </a:moveTo>
+                <a:cubicBezTo>
+                  <a:pt x="367" y="0"/>
+                  <a:pt x="372" y="5"/>
+                  <a:pt x="372" y="12"/>
+                </a:cubicBezTo>
+                <a:lnTo>
+                  <a:pt x="372" y="55"/>
+                </a:lnTo>
+                <a:lnTo>
+                  <a:pt x="0" y="55"/>
+                </a:lnTo>
+                <a:lnTo>
+                  <a:pt x="0" y="12"/>
+                </a:lnTo>
+                <a:cubicBezTo>
+                  <a:pt x="0" y="5"/>
+                  <a:pt x="5" y="0"/>
+                  <a:pt x="12" y="0"/>
+                </a:cubicBezTo>
+                <a:lnTo>
+                  <a:pt x="360" y="0"/>
+                </a:lnTo>
+                <a:close/>
+              </a:path>
+            </a:pathLst>
+          </a:custGeom>
+          <a:gradFill>
+            <a:gsLst>
+              <a:gs pos="0">
+                <a:srgbClr val="2563EB"/>
+              </a:gs>
+              <a:gs pos="100000">
+                <a:srgbClr val="0EA5E9"/>
+              </a:gs>
+            </a:gsLst>
+            <a:lin ang="2700000" scaled="1"/>
+          </a:gradFill>
+          <a:ln/>
+        </p:spPr>
+        <p:txBody>
+          <a:bodyPr/>
+          <a:p/>
+        </p:txBody>
+      </p:sp>
+      <p:sp>
+        <p:nvSpPr>
+          <p:cNvPr id="285" name="" descr="{&quot;isTemplate&quot;:true,&quot;type&quot;:&quot;text&quot;}"/>
+          <p:cNvSpPr txBox="1"/>
+          <p:nvPr/>
+        </p:nvSpPr>
+        <p:spPr>
+          <a:xfrm rot="0" flipH="0" flipV="0">
+            <a:off x="8248650" y="1276350"/>
+            <a:ext cx="3124200" cy="257175"/>
+          </a:xfrm>
+          <a:prstGeom prst="rect"/>
+        </p:spPr>
+        <p:txBody>
+          <a:bodyPr wrap="none" lIns="0" tIns="0" rIns="0" bIns="0"/>
+          <a:p>
+            <a:pPr>
+              <a:lnSpc>
+                <a:spcPct val="100000"/>
+              </a:lnSpc>
+            </a:pPr>
+            <a:r>
+              <a:rPr lang="en-US" sz="1650" b="1">
+                <a:solidFill>
+                  <a:srgbClr val="FFFFFF"/>
+                </a:solidFill>
+                <a:latin typeface="思源黑体"/>
+                <a:ea typeface="思源黑体"/>
+              </a:rPr>
+              <a:t>③ 角色权限与加密传输</a:t>
+            </a:r>
+            <a:endParaRPr/>
+          </a:p>
+        </p:txBody>
+      </p:sp>
+      <p:sp>
+        <p:nvSpPr>
+          <p:cNvPr id="286" name="" descr="{&quot;isTemplate&quot;:true,&quot;type&quot;:&quot;text&quot;}"/>
+          <p:cNvSpPr txBox="1"/>
+          <p:nvPr/>
+        </p:nvSpPr>
+        <p:spPr>
+          <a:xfrm rot="0" flipH="0" flipV="0">
+            <a:off x="8210550" y="1838325"/>
+            <a:ext cx="3971925" cy="1323975"/>
+          </a:xfrm>
+          <a:prstGeom prst="rect"/>
+        </p:spPr>
+        <p:txBody>
+          <a:bodyPr wrap="square" lIns="0" tIns="0" rIns="0" bIns="0">
+            <a:normAutofit/>
+          </a:bodyPr>
+          <a:p>
+            <a:pPr>
+              <a:lnSpc>
+                <a:spcPct val="160000"/>
+              </a:lnSpc>
+            </a:pPr>
+            <a:r>
+              <a:rPr lang="en-US" sz="1350">
+                <a:solidFill>
+                  <a:srgbClr val="0F172A"/>
+                </a:solidFill>
+                <a:latin typeface="思源黑体"/>
+                <a:ea typeface="思源黑体"/>
+              </a:rPr>
+              <a:t>按角色控制数据访问：管理员可查看与管理全部用户报告，普通用户仅限本人。</a:t>
+            </a:r>
+            <a:endParaRPr/>
+          </a:p>
+        </p:txBody>
+      </p:sp>
+      <p:sp>
+        <p:nvSpPr>
+          <p:cNvPr id="287" name="" descr="{&quot;isTemplate&quot;:true,&quot;type&quot;:&quot;text&quot;}"/>
+          <p:cNvSpPr txBox="1"/>
+          <p:nvPr/>
+        </p:nvSpPr>
+        <p:spPr>
+          <a:xfrm rot="0" flipH="0" flipV="0">
+            <a:off x="8210550" y="3276600"/>
+            <a:ext cx="3200400" cy="666750"/>
+          </a:xfrm>
+          <a:prstGeom prst="rect"/>
+        </p:spPr>
+        <p:txBody>
+          <a:bodyPr wrap="square" lIns="0" tIns="0" rIns="0" bIns="0">
+            <a:normAutofit/>
+          </a:bodyPr>
+          <a:p>
+            <a:pPr>
+              <a:lnSpc>
+                <a:spcPct val="160000"/>
+              </a:lnSpc>
+            </a:pPr>
+            <a:r>
+              <a:rPr lang="zh-CN" sz="1350">
+                <a:solidFill>
+                  <a:srgbClr val="0F172A"/>
+                </a:solidFill>
+                <a:latin typeface="思源黑体"/>
+                <a:ea typeface="思源黑体"/>
+              </a:rPr>
+              <a:t>传输层启用 HTTPS（TLS），启动脚本自动检测证书；校验贯穿全部接口。</a:t>
+            </a:r>
+            <a:endParaRPr/>
+          </a:p>
+        </p:txBody>
+      </p:sp>
+      <p:sp>
+        <p:nvSpPr>
+          <p:cNvPr id="288" name="" descr="{&quot;isTemplate&quot;:true,&quot;type&quot;:&quot;text&quot;}"/>
+          <p:cNvSpPr txBox="1"/>
+          <p:nvPr/>
+        </p:nvSpPr>
+        <p:spPr>
+          <a:xfrm rot="0" flipH="0" flipV="0">
+            <a:off x="8210550" y="5105400"/>
+            <a:ext cx="3200400" cy="200025"/>
+          </a:xfrm>
+          <a:prstGeom prst="rect"/>
+        </p:spPr>
+        <p:txBody>
+          <a:bodyPr wrap="none" lIns="0" tIns="0" rIns="0" bIns="0"/>
+          <a:p>
+            <a:pPr>
+              <a:lnSpc>
+                <a:spcPct val="100000"/>
+              </a:lnSpc>
+            </a:pPr>
+            <a:r>
+              <a:rPr lang="zh-CN" sz="1275" b="1">
+                <a:solidFill>
+                  <a:srgbClr val="F59E0B"/>
+                </a:solidFill>
+                <a:latin typeface="思源黑体"/>
+                <a:ea typeface="思源黑体"/>
+              </a:rPr>
+              <a:t>双角色 ｜ 越权列表 403</a:t>
+            </a:r>
+            <a:endParaRPr/>
+          </a:p>
+        </p:txBody>
+      </p:sp>
+      <p:sp>
+        <p:nvSpPr>
+          <p:cNvPr id="289" name=""/>
+          <p:cNvSpPr/>
+          <p:nvPr/>
+        </p:nvSpPr>
+        <p:spPr>
+          <a:xfrm rot="0" flipH="0" flipV="0">
+            <a:off x="609600" y="5648325"/>
+            <a:ext cx="10972800" cy="638175"/>
+          </a:xfrm>
+          <a:prstGeom prst="roundRect">
+            <a:avLst>
+              <a:gd name="adj" fmla="val 17910"/>
+            </a:avLst>
+          </a:prstGeom>
+          <a:solidFill>
+            <a:srgbClr val="2563EB">
+              <a:alpha val="6000"/>
+            </a:srgbClr>
+          </a:solidFill>
+          <a:ln/>
+        </p:spPr>
+        <p:txBody>
+          <a:bodyPr/>
+          <a:p/>
+        </p:txBody>
+      </p:sp>
+      <p:sp>
+        <p:nvSpPr>
+          <p:cNvPr id="290" name="" descr="{&quot;isTemplate&quot;:true,&quot;type&quot;:&quot;text&quot;}"/>
+          <p:cNvSpPr txBox="1"/>
+          <p:nvPr/>
+        </p:nvSpPr>
+        <p:spPr>
+          <a:xfrm rot="0" flipH="0" flipV="0">
+            <a:off x="838200" y="5857875"/>
+            <a:ext cx="762000" cy="228600"/>
+          </a:xfrm>
+          <a:prstGeom prst="rect"/>
+        </p:spPr>
+        <p:txBody>
+          <a:bodyPr wrap="none" lIns="0" tIns="0" rIns="0" bIns="0"/>
+          <a:p>
+            <a:pPr>
+              <a:lnSpc>
+                <a:spcPct val="100000"/>
+              </a:lnSpc>
+            </a:pPr>
+            <a:r>
+              <a:rPr lang="zh-CN" sz="1500" b="1">
+                <a:solidFill>
+                  <a:srgbClr val="2563EB"/>
+                </a:solidFill>
+                <a:latin typeface="思源黑体"/>
+                <a:ea typeface="思源黑体"/>
+              </a:rPr>
+              <a:t>实现纪律</a:t>
+            </a:r>
+            <a:endParaRPr/>
+          </a:p>
+        </p:txBody>
+      </p:sp>
+      <p:sp>
+        <p:nvSpPr>
+          <p:cNvPr id="291" name="" descr="{&quot;isTemplate&quot;:true,&quot;type&quot;:&quot;text&quot;}"/>
+          <p:cNvSpPr txBox="1"/>
+          <p:nvPr/>
+        </p:nvSpPr>
+        <p:spPr>
+          <a:xfrm rot="0" flipH="0" flipV="0">
+            <a:off x="1790700" y="5800725"/>
+            <a:ext cx="7210425" cy="333375"/>
+          </a:xfrm>
+          <a:prstGeom prst="rect"/>
+        </p:spPr>
+        <p:txBody>
+          <a:bodyPr wrap="none" lIns="0" tIns="0" rIns="0" bIns="0"/>
+          <a:p>
+            <a:pPr>
+              <a:lnSpc>
+                <a:spcPct val="150000"/>
+              </a:lnSpc>
+            </a:pPr>
+            <a:r>
+              <a:rPr lang="zh-CN" sz="1425">
+                <a:solidFill>
+                  <a:srgbClr val="0F172A"/>
+                </a:solidFill>
+                <a:latin typeface="思源黑体"/>
+                <a:ea typeface="思源黑体"/>
+              </a:rPr>
+              <a:t>四项能力均按任务书明文要求实现，并配自动化测试覆盖：全量 pytest 40 passed。</a:t>
+            </a:r>
+            <a:endParaRPr/>
+          </a:p>
+        </p:txBody>
+      </p:sp>
+      <p:sp>
+        <p:nvSpPr>
+          <p:cNvPr id="292" name="" descr="{&quot;isTemplate&quot;:true,&quot;type&quot;:&quot;text&quot;}"/>
+          <p:cNvSpPr txBox="1"/>
+          <p:nvPr/>
+        </p:nvSpPr>
+        <p:spPr>
+          <a:xfrm rot="0" flipH="0" flipV="0">
+            <a:off x="609600" y="6400800"/>
+            <a:ext cx="1590675" cy="161925"/>
+          </a:xfrm>
+          <a:prstGeom prst="rect"/>
+        </p:spPr>
+        <p:txBody>
+          <a:bodyPr wrap="none" lIns="0" tIns="0" rIns="0" bIns="0"/>
+          <a:p>
+            <a:pPr>
+              <a:lnSpc>
+                <a:spcPct val="100000"/>
+              </a:lnSpc>
+            </a:pPr>
+            <a:r>
+              <a:rPr lang="zh-CN" sz="1050">
+                <a:solidFill>
+                  <a:srgbClr val="64748B"/>
+                </a:solidFill>
+                <a:latin typeface="思源黑体"/>
+                <a:ea typeface="思源黑体"/>
+              </a:rPr>
+              <a:t>电商运营报表自动化</a:t>
+            </a:r>
+            <a:r>
+              <a:rPr lang="en-US" sz="1050">
+                <a:solidFill>
+                  <a:srgbClr val="64748B"/>
+                </a:solidFill>
+                <a:latin typeface="思源黑体"/>
+                <a:ea typeface="思源黑体"/>
+              </a:rPr>
+              <a:t> Agent</a:t>
+            </a:r>
+            <a:endParaRPr/>
+          </a:p>
+        </p:txBody>
+      </p:sp>
+      <p:sp>
+        <p:nvSpPr>
+          <p:cNvPr id="293" name="" descr="{&quot;isTemplate&quot;:true,&quot;type&quot;:&quot;text&quot;}"/>
+          <p:cNvSpPr txBox="1"/>
+          <p:nvPr/>
+        </p:nvSpPr>
+        <p:spPr>
+          <a:xfrm rot="0" flipH="0" flipV="0">
+            <a:off x="11153775" y="6400800"/>
+            <a:ext cx="428625" cy="161925"/>
+          </a:xfrm>
+          <a:prstGeom prst="rect"/>
+        </p:spPr>
+        <p:txBody>
+          <a:bodyPr wrap="none" lIns="0" tIns="0" rIns="0" bIns="0"/>
+          <a:p>
+            <a:pPr>
+              <a:lnSpc>
+                <a:spcPct val="100000"/>
+              </a:lnSpc>
+            </a:pPr>
+            <a:r>
+              <a:rPr lang="en-US" sz="1050">
+                <a:solidFill>
+                  <a:srgbClr val="64748B"/>
+                </a:solidFill>
+                <a:latin typeface="思源黑体"/>
+                <a:ea typeface="思源黑体"/>
+              </a:rPr>
+              <a:t>09 / 13</a:t>
+            </a:r>
+            <a:endParaRPr/>
+          </a:p>
+        </p:txBody>
+      </p:sp>
+    </p:spTree>
+  </p:cSld>
+  <p:clrMapOvr>
+    <a:masterClrMapping/>
+  </p:clrMapOvr>
+</p:sld>
+</file>
+
 <file path=ppt/slides/slide2.xml><?xml version="1.0" encoding="utf-8"?>
 <p:sld xmlns:p="http://schemas.openxmlformats.org/presentationml/2006/main" xmlns:a="http://schemas.openxmlformats.org/drawingml/2006/main">
   <p:cSld>
@@ -5477,7 +6497,7 @@
                 <a:latin typeface="思源黑体"/>
                 <a:ea typeface="思源黑体"/>
               </a:rPr>
-              <a:t>02 / 12</a:t>
+              <a:t>02 / 13</a:t>
             </a:r>
             <a:endParaRPr/>
           </a:p>
@@ -6767,7 +7787,7 @@
                 <a:latin typeface="思源黑体"/>
                 <a:ea typeface="思源黑体"/>
               </a:rPr>
-              <a:t>03 / 12</a:t>
+              <a:t>03 / 13</a:t>
             </a:r>
             <a:endParaRPr/>
           </a:p>
@@ -7936,7 +8956,7 @@
                 <a:latin typeface="思源黑体"/>
                 <a:ea typeface="思源黑体"/>
               </a:rPr>
-              <a:t>04 / 12</a:t>
+              <a:t>04 / 13</a:t>
             </a:r>
             <a:endParaRPr/>
           </a:p>
@@ -8378,97 +9398,7 @@
                 <a:latin typeface="思源黑体"/>
                 <a:ea typeface="思源黑体"/>
               </a:rPr>
-              <a:t>FastAPI + uvicorn </a:t>
-            </a:r>
-            <a:r>
-              <a:rPr lang="zh-CN" sz="1350">
-                <a:solidFill>
-                  <a:srgbClr val="0F172A"/>
-                </a:solidFill>
-                <a:latin typeface="思源黑体"/>
-                <a:ea typeface="思源黑体"/>
-              </a:rPr>
-              <a:t>｜</a:t>
-            </a:r>
-            <a:r>
-              <a:rPr lang="en-US" sz="1350">
-                <a:solidFill>
-                  <a:srgbClr val="0F172A"/>
-                </a:solidFill>
-                <a:latin typeface="思源黑体"/>
-                <a:ea typeface="思源黑体"/>
-              </a:rPr>
-              <a:t> JWT </a:t>
-            </a:r>
-            <a:r>
-              <a:rPr lang="zh-CN" sz="1350">
-                <a:solidFill>
-                  <a:srgbClr val="0F172A"/>
-                </a:solidFill>
-                <a:latin typeface="思源黑体"/>
-                <a:ea typeface="思源黑体"/>
-              </a:rPr>
-              <a:t>鉴权（</a:t>
-            </a:r>
-            <a:r>
-              <a:rPr lang="en-US" sz="1350">
-                <a:solidFill>
-                  <a:srgbClr val="0F172A"/>
-                </a:solidFill>
-                <a:latin typeface="思源黑体"/>
-                <a:ea typeface="思源黑体"/>
-              </a:rPr>
-              <a:t>bcrypt </a:t>
-            </a:r>
-            <a:r>
-              <a:rPr lang="zh-CN" sz="1350">
-                <a:solidFill>
-                  <a:srgbClr val="0F172A"/>
-                </a:solidFill>
-                <a:latin typeface="思源黑体"/>
-                <a:ea typeface="思源黑体"/>
-              </a:rPr>
-              <a:t>哈希）｜</a:t>
-            </a:r>
-            <a:r>
-              <a:rPr lang="en-US" sz="1350">
-                <a:solidFill>
-                  <a:srgbClr val="0F172A"/>
-                </a:solidFill>
-                <a:latin typeface="思源黑体"/>
-                <a:ea typeface="思源黑体"/>
-              </a:rPr>
-              <a:t> </a:t>
-            </a:r>
-            <a:r>
-              <a:rPr lang="zh-CN" sz="1350">
-                <a:solidFill>
-                  <a:srgbClr val="0F172A"/>
-                </a:solidFill>
-                <a:latin typeface="思源黑体"/>
-                <a:ea typeface="思源黑体"/>
-              </a:rPr>
-              <a:t>报告生命周期接口（含异步生成）｜</a:t>
-            </a:r>
-            <a:r>
-              <a:rPr lang="en-US" sz="1350">
-                <a:solidFill>
-                  <a:srgbClr val="0F172A"/>
-                </a:solidFill>
-                <a:latin typeface="思源黑体"/>
-                <a:ea typeface="思源黑体"/>
-              </a:rPr>
-              <a:t> </a:t>
-            </a:r>
-            <a:r>
-              <a:rPr lang="zh-CN" sz="1350">
-                <a:solidFill>
-                  <a:srgbClr val="0F172A"/>
-                </a:solidFill>
-                <a:latin typeface="思源黑体"/>
-                <a:ea typeface="思源黑体"/>
-              </a:rPr>
-              <a:t>单端口托管前端静态产物</a:t>
+              <a:t>FastAPI + uvicorn ｜ JWT 与角色权限（admin / user）｜ HTTPS 加密传输 ｜ 异步生成 ｜ 定时调度（APScheduler）</a:t>
             </a:r>
             <a:endParaRPr/>
           </a:p>
@@ -8774,177 +9704,7 @@
                 <a:latin typeface="思源黑体"/>
                 <a:ea typeface="思源黑体"/>
               </a:rPr>
-              <a:t>pandas / openpyxl </a:t>
-            </a:r>
-            <a:r>
-              <a:rPr lang="zh-CN" sz="1350">
-                <a:solidFill>
-                  <a:srgbClr val="0F172A"/>
-                </a:solidFill>
-                <a:latin typeface="思源黑体"/>
-                <a:ea typeface="思源黑体"/>
-              </a:rPr>
-              <a:t>指标计算</a:t>
-            </a:r>
-            <a:r>
-              <a:rPr lang="en-US" sz="1350">
-                <a:solidFill>
-                  <a:srgbClr val="0F172A"/>
-                </a:solidFill>
-                <a:latin typeface="思源黑体"/>
-                <a:ea typeface="思源黑体"/>
-              </a:rPr>
-              <a:t> </a:t>
-            </a:r>
-            <a:r>
-              <a:rPr lang="zh-CN" sz="1350">
-                <a:solidFill>
-                  <a:srgbClr val="0F172A"/>
-                </a:solidFill>
-                <a:latin typeface="思源黑体"/>
-                <a:ea typeface="思源黑体"/>
-              </a:rPr>
-              <a:t>｜</a:t>
-            </a:r>
-            <a:r>
-              <a:rPr lang="en-US" sz="1350">
-                <a:solidFill>
-                  <a:srgbClr val="0F172A"/>
-                </a:solidFill>
-                <a:latin typeface="思源黑体"/>
-                <a:ea typeface="思源黑体"/>
-              </a:rPr>
-              <a:t> </a:t>
-            </a:r>
-            <a:r>
-              <a:rPr lang="zh-CN" sz="1350">
-                <a:solidFill>
-                  <a:srgbClr val="0F172A"/>
-                </a:solidFill>
-                <a:latin typeface="思源黑体"/>
-                <a:ea typeface="思源黑体"/>
-              </a:rPr>
-              <a:t>清洗规则</a:t>
-            </a:r>
-            <a:r>
-              <a:rPr lang="en-US" sz="1350">
-                <a:solidFill>
-                  <a:srgbClr val="0F172A"/>
-                </a:solidFill>
-                <a:latin typeface="思源黑体"/>
-                <a:ea typeface="思源黑体"/>
-              </a:rPr>
-              <a:t> R1–R6 </a:t>
-            </a:r>
-            <a:r>
-              <a:rPr lang="zh-CN" sz="1350">
-                <a:solidFill>
-                  <a:srgbClr val="0F172A"/>
-                </a:solidFill>
-                <a:latin typeface="思源黑体"/>
-                <a:ea typeface="思源黑体"/>
-              </a:rPr>
-              <a:t>｜</a:t>
-            </a:r>
-            <a:r>
-              <a:rPr lang="en-US" sz="1350">
-                <a:solidFill>
-                  <a:srgbClr val="0F172A"/>
-                </a:solidFill>
-                <a:latin typeface="思源黑体"/>
-                <a:ea typeface="思源黑体"/>
-              </a:rPr>
-              <a:t> </a:t>
-            </a:r>
-            <a:r>
-              <a:rPr lang="zh-CN" sz="1350">
-                <a:solidFill>
-                  <a:srgbClr val="0F172A"/>
-                </a:solidFill>
-                <a:latin typeface="思源黑体"/>
-                <a:ea typeface="思源黑体"/>
-              </a:rPr>
-              <a:t>双轨对账（</a:t>
-            </a:r>
-            <a:r>
-              <a:rPr lang="en-US" sz="1350">
-                <a:solidFill>
-                  <a:srgbClr val="0F172A"/>
-                </a:solidFill>
-                <a:latin typeface="思源黑体"/>
-                <a:ea typeface="思源黑体"/>
-              </a:rPr>
-              <a:t>pandas vs </a:t>
-            </a:r>
-            <a:r>
-              <a:rPr lang="zh-CN" sz="1350">
-                <a:solidFill>
-                  <a:srgbClr val="0F172A"/>
-                </a:solidFill>
-                <a:latin typeface="思源黑体"/>
-                <a:ea typeface="思源黑体"/>
-              </a:rPr>
-              <a:t>纯</a:t>
-            </a:r>
-            <a:r>
-              <a:rPr lang="en-US" sz="1350">
-                <a:solidFill>
-                  <a:srgbClr val="0F172A"/>
-                </a:solidFill>
-                <a:latin typeface="思源黑体"/>
-                <a:ea typeface="思源黑体"/>
-              </a:rPr>
-              <a:t> SQL</a:t>
-            </a:r>
-            <a:r>
-              <a:rPr lang="zh-CN" sz="1350">
-                <a:solidFill>
-                  <a:srgbClr val="0F172A"/>
-                </a:solidFill>
-                <a:latin typeface="思源黑体"/>
-                <a:ea typeface="思源黑体"/>
-              </a:rPr>
-              <a:t>）｜</a:t>
-            </a:r>
-            <a:r>
-              <a:rPr lang="en-US" sz="1350">
-                <a:solidFill>
-                  <a:srgbClr val="0F172A"/>
-                </a:solidFill>
-                <a:latin typeface="思源黑体"/>
-                <a:ea typeface="思源黑体"/>
-              </a:rPr>
-              <a:t> </a:t>
-            </a:r>
-            <a:r>
-              <a:rPr lang="zh-CN" sz="1350">
-                <a:solidFill>
-                  <a:srgbClr val="0F172A"/>
-                </a:solidFill>
-                <a:latin typeface="思源黑体"/>
-                <a:ea typeface="思源黑体"/>
-              </a:rPr>
-              <a:t>报告导出（</a:t>
-            </a:r>
-            <a:r>
-              <a:rPr lang="en-US" sz="1350">
-                <a:solidFill>
-                  <a:srgbClr val="0F172A"/>
-                </a:solidFill>
-                <a:latin typeface="思源黑体"/>
-                <a:ea typeface="思源黑体"/>
-              </a:rPr>
-              <a:t>python-docx</a:t>
-            </a:r>
-            <a:r>
-              <a:rPr lang="zh-CN" sz="1350">
-                <a:solidFill>
-                  <a:srgbClr val="0F172A"/>
-                </a:solidFill>
-                <a:latin typeface="思源黑体"/>
-                <a:ea typeface="思源黑体"/>
-              </a:rPr>
-              <a:t>）</a:t>
+              <a:t>pandas / openpyxl 指标计算 ｜ 清洗规则 R1–R6 ｜ 双轨对账（pandas vs SQL）｜ 导出（docx）｜ 批量任务</a:t>
             </a:r>
             <a:endParaRPr/>
           </a:p>
@@ -9172,7 +9932,7 @@
                 <a:latin typeface="思源黑体"/>
                 <a:ea typeface="思源黑体"/>
               </a:rPr>
-              <a:t>05 / 12</a:t>
+              <a:t>05 / 13</a:t>
             </a:r>
             <a:endParaRPr/>
           </a:p>
@@ -10798,7 +11558,7 @@
                 <a:latin typeface="思源黑体"/>
                 <a:ea typeface="思源黑体"/>
               </a:rPr>
-              <a:t>06 / 12</a:t>
+              <a:t>06 / 13</a:t>
             </a:r>
             <a:endParaRPr/>
           </a:p>
@@ -12658,7 +13418,7 @@
                 <a:latin typeface="思源黑体"/>
                 <a:ea typeface="思源黑体"/>
               </a:rPr>
-              <a:t>07 / 12</a:t>
+              <a:t>07 / 13</a:t>
             </a:r>
             <a:endParaRPr/>
           </a:p>
@@ -13951,7 +14711,7 @@
                 <a:latin typeface="思源黑体"/>
                 <a:ea typeface="思源黑体"/>
               </a:rPr>
-              <a:t>08 / 12</a:t>
+              <a:t>08 / 13</a:t>
             </a:r>
             <a:endParaRPr/>
           </a:p>
@@ -14709,7 +15469,7 @@
                 <a:latin typeface="思源黑体"/>
                 <a:ea typeface="思源黑体"/>
               </a:rPr>
-              <a:t>26</a:t>
+              <a:t>40</a:t>
             </a:r>
             <a:endParaRPr/>
           </a:p>
@@ -15139,7 +15899,7 @@
                 <a:latin typeface="思源黑体"/>
                 <a:ea typeface="思源黑体"/>
               </a:rPr>
-              <a:t>09 / 12</a:t>
+              <a:t>10 / 13</a:t>
             </a:r>
             <a:endParaRPr/>
           </a:p>
